--- a/04_lambda.pptx
+++ b/04_lambda.pptx
@@ -279,7 +279,7 @@
           <a:p>
             <a:fld id="{7952453C-A5FB-4FDE-A708-76FC0F8C47D7}" type="datetimeFigureOut">
               <a:rPr lang="zh-CN" altLang="en-US" smtClean="0"/>
-              <a:t>2026/9/8</a:t>
+              <a:t>2026/9/21</a:t>
             </a:fld>
             <a:endParaRPr lang="zh-CN" altLang="en-US"/>
           </a:p>
@@ -2003,7 +2003,7 @@
           <a:p>
             <a:fld id="{B797416A-26F7-4D36-8ACC-1F8188085B70}" type="datetimeFigureOut">
               <a:rPr lang="zh-CN" altLang="en-US" smtClean="0"/>
-              <a:t>2026/9/8</a:t>
+              <a:t>2026/9/21</a:t>
             </a:fld>
             <a:endParaRPr lang="zh-CN" altLang="en-US"/>
           </a:p>
@@ -2173,7 +2173,7 @@
           <a:p>
             <a:fld id="{B797416A-26F7-4D36-8ACC-1F8188085B70}" type="datetimeFigureOut">
               <a:rPr lang="zh-CN" altLang="en-US" smtClean="0"/>
-              <a:t>2026/9/8</a:t>
+              <a:t>2026/9/21</a:t>
             </a:fld>
             <a:endParaRPr lang="zh-CN" altLang="en-US"/>
           </a:p>
@@ -2353,7 +2353,7 @@
           <a:p>
             <a:fld id="{B797416A-26F7-4D36-8ACC-1F8188085B70}" type="datetimeFigureOut">
               <a:rPr lang="zh-CN" altLang="en-US" smtClean="0"/>
-              <a:t>2026/9/8</a:t>
+              <a:t>2026/9/21</a:t>
             </a:fld>
             <a:endParaRPr lang="zh-CN" altLang="en-US"/>
           </a:p>
@@ -2523,7 +2523,7 @@
           <a:p>
             <a:fld id="{B797416A-26F7-4D36-8ACC-1F8188085B70}" type="datetimeFigureOut">
               <a:rPr lang="zh-CN" altLang="en-US" smtClean="0"/>
-              <a:t>2026/9/8</a:t>
+              <a:t>2026/9/21</a:t>
             </a:fld>
             <a:endParaRPr lang="zh-CN" altLang="en-US"/>
           </a:p>
@@ -2767,7 +2767,7 @@
           <a:p>
             <a:fld id="{B797416A-26F7-4D36-8ACC-1F8188085B70}" type="datetimeFigureOut">
               <a:rPr lang="zh-CN" altLang="en-US" smtClean="0"/>
-              <a:t>2026/9/8</a:t>
+              <a:t>2026/9/21</a:t>
             </a:fld>
             <a:endParaRPr lang="zh-CN" altLang="en-US"/>
           </a:p>
@@ -2999,7 +2999,7 @@
           <a:p>
             <a:fld id="{B797416A-26F7-4D36-8ACC-1F8188085B70}" type="datetimeFigureOut">
               <a:rPr lang="zh-CN" altLang="en-US" smtClean="0"/>
-              <a:t>2026/9/8</a:t>
+              <a:t>2026/9/21</a:t>
             </a:fld>
             <a:endParaRPr lang="zh-CN" altLang="en-US"/>
           </a:p>
@@ -3366,7 +3366,7 @@
           <a:p>
             <a:fld id="{B797416A-26F7-4D36-8ACC-1F8188085B70}" type="datetimeFigureOut">
               <a:rPr lang="zh-CN" altLang="en-US" smtClean="0"/>
-              <a:t>2026/9/8</a:t>
+              <a:t>2026/9/21</a:t>
             </a:fld>
             <a:endParaRPr lang="zh-CN" altLang="en-US"/>
           </a:p>
@@ -3484,7 +3484,7 @@
           <a:p>
             <a:fld id="{B797416A-26F7-4D36-8ACC-1F8188085B70}" type="datetimeFigureOut">
               <a:rPr lang="zh-CN" altLang="en-US" smtClean="0"/>
-              <a:t>2026/9/8</a:t>
+              <a:t>2026/9/21</a:t>
             </a:fld>
             <a:endParaRPr lang="zh-CN" altLang="en-US"/>
           </a:p>
@@ -3579,7 +3579,7 @@
           <a:p>
             <a:fld id="{B797416A-26F7-4D36-8ACC-1F8188085B70}" type="datetimeFigureOut">
               <a:rPr lang="zh-CN" altLang="en-US" smtClean="0"/>
-              <a:t>2026/9/8</a:t>
+              <a:t>2026/9/21</a:t>
             </a:fld>
             <a:endParaRPr lang="zh-CN" altLang="en-US"/>
           </a:p>
@@ -3856,7 +3856,7 @@
           <a:p>
             <a:fld id="{B797416A-26F7-4D36-8ACC-1F8188085B70}" type="datetimeFigureOut">
               <a:rPr lang="zh-CN" altLang="en-US" smtClean="0"/>
-              <a:t>2026/9/8</a:t>
+              <a:t>2026/9/21</a:t>
             </a:fld>
             <a:endParaRPr lang="zh-CN" altLang="en-US"/>
           </a:p>
@@ -4113,7 +4113,7 @@
           <a:p>
             <a:fld id="{B797416A-26F7-4D36-8ACC-1F8188085B70}" type="datetimeFigureOut">
               <a:rPr lang="zh-CN" altLang="en-US" smtClean="0"/>
-              <a:t>2026/9/8</a:t>
+              <a:t>2026/9/21</a:t>
             </a:fld>
             <a:endParaRPr lang="zh-CN" altLang="en-US"/>
           </a:p>
@@ -4326,7 +4326,7 @@
           <a:p>
             <a:fld id="{B797416A-26F7-4D36-8ACC-1F8188085B70}" type="datetimeFigureOut">
               <a:rPr lang="zh-CN" altLang="en-US" smtClean="0"/>
-              <a:t>2026/9/8</a:t>
+              <a:t>2026/9/21</a:t>
             </a:fld>
             <a:endParaRPr lang="zh-CN" altLang="en-US"/>
           </a:p>
@@ -30296,8 +30296,8 @@
           </a:p>
         </p:txBody>
       </p:sp>
-      <mc:AlternateContent xmlns:mc="http://schemas.openxmlformats.org/markup-compatibility/2006">
-        <mc:Choice xmlns:a14="http://schemas.microsoft.com/office/drawing/2010/main" Requires="a14">
+      <mc:AlternateContent xmlns:mc="http://schemas.openxmlformats.org/markup-compatibility/2006" xmlns:a14="http://schemas.microsoft.com/office/drawing/2010/main">
+        <mc:Choice Requires="a14">
           <p:sp>
             <p:nvSpPr>
               <p:cNvPr id="6" name="文本框 5"/>
@@ -30492,7 +30492,7 @@
             </p:txBody>
           </p:sp>
         </mc:Choice>
-        <mc:Fallback>
+        <mc:Fallback xmlns="">
           <p:sp>
             <p:nvSpPr>
               <p:cNvPr id="6" name="文本框 5"/>
@@ -30531,8 +30531,8 @@
           </p:sp>
         </mc:Fallback>
       </mc:AlternateContent>
-      <mc:AlternateContent xmlns:mc="http://schemas.openxmlformats.org/markup-compatibility/2006">
-        <mc:Choice xmlns:a14="http://schemas.microsoft.com/office/drawing/2010/main" Requires="a14">
+      <mc:AlternateContent xmlns:mc="http://schemas.openxmlformats.org/markup-compatibility/2006" xmlns:a14="http://schemas.microsoft.com/office/drawing/2010/main">
+        <mc:Choice Requires="a14">
           <p:sp>
             <p:nvSpPr>
               <p:cNvPr id="8" name="文本框 7"/>
@@ -30752,7 +30752,7 @@
             </p:txBody>
           </p:sp>
         </mc:Choice>
-        <mc:Fallback>
+        <mc:Fallback xmlns="">
           <p:sp>
             <p:nvSpPr>
               <p:cNvPr id="8" name="文本框 7"/>
@@ -32592,12 +32592,12 @@
         <p:spPr>
           <a:xfrm>
             <a:off x="5173577" y="2486109"/>
-            <a:ext cx="2827422" cy="3030370"/>
+            <a:ext cx="2827422" cy="3769034"/>
           </a:xfrm>
           <a:prstGeom prst="wedgeRoundRectCallout">
             <a:avLst>
               <a:gd name="adj1" fmla="val -81959"/>
-              <a:gd name="adj2" fmla="val -14894"/>
+              <a:gd name="adj2" fmla="val -20691"/>
               <a:gd name="adj3" fmla="val 16667"/>
             </a:avLst>
           </a:prstGeom>
@@ -32661,6 +32661,17 @@
                 </a:solidFill>
                 <a:sym typeface="Symbol" panose="05050102010706020507" pitchFamily="18" charset="2"/>
               </a:rPr>
+              <a:t> (y. False) True</a:t>
+            </a:r>
+          </a:p>
+          <a:p>
+            <a:r>
+              <a:rPr lang="en-US" altLang="zh-CN" sz="2400" dirty="0">
+                <a:solidFill>
+                  <a:schemeClr val="tx1"/>
+                </a:solidFill>
+                <a:sym typeface="Symbol" panose="05050102010706020507" pitchFamily="18" charset="2"/>
+              </a:rPr>
               <a:t> False</a:t>
             </a:r>
             <a:endParaRPr lang="zh-CN" altLang="en-US" sz="2400" dirty="0">
@@ -32715,6 +32726,22 @@
                 <a:sym typeface="Symbol" panose="05050102010706020507" pitchFamily="18" charset="2"/>
               </a:rPr>
               <a:t> True</a:t>
+            </a:r>
+            <a:endParaRPr lang="en-US" altLang="zh-CN" sz="2400" dirty="0">
+              <a:solidFill>
+                <a:schemeClr val="tx1"/>
+              </a:solidFill>
+            </a:endParaRPr>
+          </a:p>
+          <a:p>
+            <a:r>
+              <a:rPr lang="en-US" altLang="zh-CN" sz="2400" dirty="0">
+                <a:solidFill>
+                  <a:schemeClr val="tx1"/>
+                </a:solidFill>
+                <a:sym typeface="Symbol" panose="05050102010706020507" pitchFamily="18" charset="2"/>
+              </a:rPr>
+              <a:t> (y. y) True</a:t>
             </a:r>
           </a:p>
           <a:p>
@@ -35650,13 +35677,13 @@
         </p:nvSpPr>
         <p:spPr>
           <a:xfrm>
-            <a:off x="5329988" y="3146593"/>
-            <a:ext cx="2827422" cy="3030370"/>
+            <a:off x="5329988" y="3146592"/>
+            <a:ext cx="2827422" cy="3553613"/>
           </a:xfrm>
           <a:prstGeom prst="wedgeRoundRectCallout">
             <a:avLst>
-              <a:gd name="adj1" fmla="val -83661"/>
-              <a:gd name="adj2" fmla="val 28382"/>
+              <a:gd name="adj1" fmla="val -83374"/>
+              <a:gd name="adj2" fmla="val 15411"/>
               <a:gd name="adj3" fmla="val 16667"/>
             </a:avLst>
           </a:prstGeom>
@@ -35747,6 +35774,26 @@
                 </a:solidFill>
                 <a:sym typeface="Symbol" panose="05050102010706020507" pitchFamily="18" charset="2"/>
               </a:rPr>
+              <a:t>x. y. (z. y)</a:t>
+            </a:r>
+          </a:p>
+          <a:p>
+            <a:r>
+              <a:rPr lang="en-US" altLang="zh-CN" sz="2400" dirty="0">
+                <a:solidFill>
+                  <a:schemeClr val="tx1"/>
+                </a:solidFill>
+                <a:sym typeface="Symbol" panose="05050102010706020507" pitchFamily="18" charset="2"/>
+              </a:rPr>
+              <a:t> </a:t>
+            </a:r>
+            <a:r>
+              <a:rPr lang="en-US" altLang="zh-CN" sz="2400" dirty="0">
+                <a:solidFill>
+                  <a:prstClr val="black"/>
+                </a:solidFill>
+                <a:sym typeface="Symbol" panose="05050102010706020507" pitchFamily="18" charset="2"/>
+              </a:rPr>
               <a:t>x. y. y = </a:t>
             </a:r>
             <a:r>
@@ -35810,6 +35857,35 @@
                 <a:sym typeface="Symbol" panose="05050102010706020507" pitchFamily="18" charset="2"/>
               </a:rPr>
               <a:t>False y x</a:t>
+            </a:r>
+          </a:p>
+          <a:p>
+            <a:r>
+              <a:rPr lang="en-US" altLang="zh-CN" sz="2400" dirty="0">
+                <a:solidFill>
+                  <a:schemeClr val="tx1"/>
+                </a:solidFill>
+                <a:sym typeface="Symbol" panose="05050102010706020507" pitchFamily="18" charset="2"/>
+              </a:rPr>
+              <a:t> </a:t>
+            </a:r>
+            <a:r>
+              <a:rPr lang="en-US" altLang="zh-CN" sz="2400" dirty="0">
+                <a:solidFill>
+                  <a:prstClr val="black"/>
+                </a:solidFill>
+                <a:sym typeface="Symbol" panose="05050102010706020507" pitchFamily="18" charset="2"/>
+              </a:rPr>
+              <a:t>x. y. </a:t>
+            </a:r>
+            <a:r>
+              <a:rPr lang="en-US" altLang="zh-CN" sz="2400" dirty="0">
+                <a:solidFill>
+                  <a:schemeClr val="tx1"/>
+                </a:solidFill>
+                <a:sym typeface="Symbol" panose="05050102010706020507" pitchFamily="18" charset="2"/>
+              </a:rPr>
+              <a:t>(y. y) x</a:t>
             </a:r>
           </a:p>
           <a:p>
@@ -36960,12 +37036,12 @@
         <p:spPr>
           <a:xfrm>
             <a:off x="5053263" y="3224463"/>
-            <a:ext cx="3573379" cy="2646948"/>
+            <a:ext cx="3573379" cy="2952500"/>
           </a:xfrm>
           <a:prstGeom prst="wedgeRoundRectCallout">
             <a:avLst>
-              <a:gd name="adj1" fmla="val -61838"/>
-              <a:gd name="adj2" fmla="val -1855"/>
+              <a:gd name="adj1" fmla="val -62517"/>
+              <a:gd name="adj2" fmla="val -6788"/>
               <a:gd name="adj3" fmla="val 16667"/>
             </a:avLst>
           </a:prstGeom>
@@ -37096,6 +37172,54 @@
                 <a:sym typeface="Symbol" panose="05050102010706020507" pitchFamily="18" charset="2"/>
               </a:rPr>
               <a:t>x) f x)</a:t>
+            </a:r>
+          </a:p>
+          <a:p>
+            <a:pPr marL="0" lvl="1"/>
+            <a:r>
+              <a:rPr lang="en-US" altLang="zh-CN" sz="2400" dirty="0">
+                <a:solidFill>
+                  <a:schemeClr val="tx1"/>
+                </a:solidFill>
+                <a:sym typeface="Symbol" panose="05050102010706020507" pitchFamily="18" charset="2"/>
+              </a:rPr>
+              <a:t> f. x. f ((x. </a:t>
+            </a:r>
+            <a:r>
+              <a:rPr lang="en-US" altLang="zh-CN" sz="2400" dirty="0" err="1">
+                <a:solidFill>
+                  <a:schemeClr val="tx1"/>
+                </a:solidFill>
+                <a:sym typeface="Symbol" panose="05050102010706020507" pitchFamily="18" charset="2"/>
+              </a:rPr>
+              <a:t>f</a:t>
+            </a:r>
+            <a:r>
+              <a:rPr lang="en-US" altLang="zh-CN" sz="2400" baseline="30000" dirty="0" err="1">
+                <a:solidFill>
+                  <a:schemeClr val="tx1"/>
+                </a:solidFill>
+                <a:sym typeface="Symbol" panose="05050102010706020507" pitchFamily="18" charset="2"/>
+              </a:rPr>
+              <a:t>n</a:t>
+            </a:r>
+            <a:r>
+              <a:rPr lang="en-US" altLang="zh-CN" sz="2400" baseline="30000" dirty="0">
+                <a:solidFill>
+                  <a:schemeClr val="tx1"/>
+                </a:solidFill>
+                <a:sym typeface="Symbol" panose="05050102010706020507" pitchFamily="18" charset="2"/>
+              </a:rPr>
+              <a:t> </a:t>
+            </a:r>
+            <a:r>
+              <a:rPr lang="en-US" altLang="zh-CN" sz="2400" dirty="0">
+                <a:solidFill>
+                  <a:schemeClr val="tx1"/>
+                </a:solidFill>
+                <a:sym typeface="Symbol" panose="05050102010706020507" pitchFamily="18" charset="2"/>
+              </a:rPr>
+              <a:t>x) x)</a:t>
             </a:r>
           </a:p>
           <a:p>
@@ -43791,8 +43915,8 @@
           </a:p>
         </p:txBody>
       </p:sp>
-      <mc:AlternateContent xmlns:mc="http://schemas.openxmlformats.org/markup-compatibility/2006">
-        <mc:Choice xmlns:a14="http://schemas.microsoft.com/office/drawing/2010/main" Requires="a14">
+      <mc:AlternateContent xmlns:mc="http://schemas.openxmlformats.org/markup-compatibility/2006" xmlns:a14="http://schemas.microsoft.com/office/drawing/2010/main">
+        <mc:Choice Requires="a14">
           <p:sp>
             <p:nvSpPr>
               <p:cNvPr id="3" name="内容占位符 2">
@@ -44105,7 +44229,7 @@
             </p:txBody>
           </p:sp>
         </mc:Choice>
-        <mc:Fallback>
+        <mc:Fallback xmlns="">
           <p:sp>
             <p:nvSpPr>
               <p:cNvPr id="3" name="内容占位符 2">
